--- a/docs/Document_Processing_POC_Manager_Deck_7_Slides.pptx
+++ b/docs/Document_Processing_POC_Manager_Deck_7_Slides.pptx
@@ -5,15 +5,16 @@
     <p:sldMasterId id="2147483648" r:id="rId1"/>
   </p:sldMasterIdLst>
   <p:sldIdLst>
-    <p:sldId id="256" r:id="rId7"/>
-    <p:sldId id="257" r:id="rId8"/>
-    <p:sldId id="258" r:id="rId9"/>
-    <p:sldId id="259" r:id="rId10"/>
-    <p:sldId id="260" r:id="rId11"/>
-    <p:sldId id="261" r:id="rId12"/>
-    <p:sldId id="262" r:id="rId13"/>
+    <p:sldId id="256" r:id="rId2"/>
+    <p:sldId id="257" r:id="rId3"/>
+    <p:sldId id="258" r:id="rId4"/>
+    <p:sldId id="259" r:id="rId5"/>
+    <p:sldId id="265" r:id="rId6"/>
+    <p:sldId id="261" r:id="rId7"/>
+    <p:sldId id="266" r:id="rId8"/>
+    <p:sldId id="262" r:id="rId9"/>
   </p:sldIdLst>
-  <p:sldSz cx="12188952" cy="6858000" type="screen4x3"/>
+  <p:sldSz cx="12188825" cy="6858000"/>
   <p:notesSz cx="6858000" cy="9144000"/>
   <p:defaultTextStyle>
     <a:defPPr>
@@ -110,6 +111,22 @@
       </a:defRPr>
     </a:lvl9pPr>
   </p:defaultTextStyle>
+  <p:extLst>
+    <p:ext uri="{EFAFB233-063F-42B5-8137-9DF3F51BA10A}">
+      <p15:sldGuideLst xmlns:p15="http://schemas.microsoft.com/office/powerpoint/2012/main">
+        <p15:guide id="1" orient="horz" pos="2160">
+          <p15:clr>
+            <a:srgbClr val="A4A3A4"/>
+          </p15:clr>
+        </p15:guide>
+        <p15:guide id="2" pos="2880">
+          <p15:clr>
+            <a:srgbClr val="A4A3A4"/>
+          </p15:clr>
+        </p15:guide>
+      </p15:sldGuideLst>
+    </p:ext>
+  </p:extLst>
 </p:presentation>
 </file>
 
@@ -151,10 +168,9 @@
           <a:lstStyle/>
           <a:p>
             <a:r>
-              <a:rPr lang="en-US" smtClean="0"/>
+              <a:rPr lang="en-US"/>
               <a:t>Click to edit Master title style</a:t>
             </a:r>
-            <a:endParaRPr lang="en-US"/>
           </a:p>
         </p:txBody>
       </p:sp>
@@ -270,10 +286,9 @@
           </a:lstStyle>
           <a:p>
             <a:r>
-              <a:rPr lang="en-US" smtClean="0"/>
+              <a:rPr lang="en-US"/>
               <a:t>Click to edit Master subtitle style</a:t>
             </a:r>
-            <a:endParaRPr lang="en-US"/>
           </a:p>
         </p:txBody>
       </p:sp>
@@ -294,7 +309,7 @@
           <a:p>
             <a:fld id="{5BCAD085-E8A6-8845-BD4E-CB4CCA059FC4}" type="datetimeFigureOut">
               <a:rPr lang="en-US" smtClean="0"/>
-              <a:t>1/27/13</a:t>
+              <a:t>8/10/26</a:t>
             </a:fld>
             <a:endParaRPr lang="en-US"/>
           </a:p>
@@ -388,10 +403,9 @@
           <a:lstStyle/>
           <a:p>
             <a:r>
-              <a:rPr lang="en-US" smtClean="0"/>
+              <a:rPr lang="en-US"/>
               <a:t>Click to edit Master title style</a:t>
             </a:r>
-            <a:endParaRPr lang="en-US"/>
           </a:p>
         </p:txBody>
       </p:sp>
@@ -412,38 +426,37 @@
           <a:p>
             <a:pPr lvl="0"/>
             <a:r>
-              <a:rPr lang="en-US" smtClean="0"/>
+              <a:rPr lang="en-US"/>
               <a:t>Click to edit Master text styles</a:t>
             </a:r>
           </a:p>
           <a:p>
             <a:pPr lvl="1"/>
             <a:r>
-              <a:rPr lang="en-US" smtClean="0"/>
+              <a:rPr lang="en-US"/>
               <a:t>Second level</a:t>
             </a:r>
           </a:p>
           <a:p>
             <a:pPr lvl="2"/>
             <a:r>
-              <a:rPr lang="en-US" smtClean="0"/>
+              <a:rPr lang="en-US"/>
               <a:t>Third level</a:t>
             </a:r>
           </a:p>
           <a:p>
             <a:pPr lvl="3"/>
             <a:r>
-              <a:rPr lang="en-US" smtClean="0"/>
+              <a:rPr lang="en-US"/>
               <a:t>Fourth level</a:t>
             </a:r>
           </a:p>
           <a:p>
             <a:pPr lvl="4"/>
             <a:r>
-              <a:rPr lang="en-US" smtClean="0"/>
+              <a:rPr lang="en-US"/>
               <a:t>Fifth level</a:t>
             </a:r>
-            <a:endParaRPr lang="en-US"/>
           </a:p>
         </p:txBody>
       </p:sp>
@@ -464,7 +477,7 @@
           <a:p>
             <a:fld id="{5BCAD085-E8A6-8845-BD4E-CB4CCA059FC4}" type="datetimeFigureOut">
               <a:rPr lang="en-US" smtClean="0"/>
-              <a:t>1/27/13</a:t>
+              <a:t>8/10/26</a:t>
             </a:fld>
             <a:endParaRPr lang="en-US"/>
           </a:p>
@@ -563,10 +576,9 @@
           <a:lstStyle/>
           <a:p>
             <a:r>
-              <a:rPr lang="en-US" smtClean="0"/>
+              <a:rPr lang="en-US"/>
               <a:t>Click to edit Master title style</a:t>
             </a:r>
-            <a:endParaRPr lang="en-US"/>
           </a:p>
         </p:txBody>
       </p:sp>
@@ -592,38 +604,37 @@
           <a:p>
             <a:pPr lvl="0"/>
             <a:r>
-              <a:rPr lang="en-US" smtClean="0"/>
+              <a:rPr lang="en-US"/>
               <a:t>Click to edit Master text styles</a:t>
             </a:r>
           </a:p>
           <a:p>
             <a:pPr lvl="1"/>
             <a:r>
-              <a:rPr lang="en-US" smtClean="0"/>
+              <a:rPr lang="en-US"/>
               <a:t>Second level</a:t>
             </a:r>
           </a:p>
           <a:p>
             <a:pPr lvl="2"/>
             <a:r>
-              <a:rPr lang="en-US" smtClean="0"/>
+              <a:rPr lang="en-US"/>
               <a:t>Third level</a:t>
             </a:r>
           </a:p>
           <a:p>
             <a:pPr lvl="3"/>
             <a:r>
-              <a:rPr lang="en-US" smtClean="0"/>
+              <a:rPr lang="en-US"/>
               <a:t>Fourth level</a:t>
             </a:r>
           </a:p>
           <a:p>
             <a:pPr lvl="4"/>
             <a:r>
-              <a:rPr lang="en-US" smtClean="0"/>
+              <a:rPr lang="en-US"/>
               <a:t>Fifth level</a:t>
             </a:r>
-            <a:endParaRPr lang="en-US"/>
           </a:p>
         </p:txBody>
       </p:sp>
@@ -644,7 +655,7 @@
           <a:p>
             <a:fld id="{5BCAD085-E8A6-8845-BD4E-CB4CCA059FC4}" type="datetimeFigureOut">
               <a:rPr lang="en-US" smtClean="0"/>
-              <a:t>1/27/13</a:t>
+              <a:t>8/10/26</a:t>
             </a:fld>
             <a:endParaRPr lang="en-US"/>
           </a:p>
@@ -738,10 +749,9 @@
           <a:lstStyle/>
           <a:p>
             <a:r>
-              <a:rPr lang="en-US" smtClean="0"/>
+              <a:rPr lang="en-US"/>
               <a:t>Click to edit Master title style</a:t>
             </a:r>
-            <a:endParaRPr lang="en-US"/>
           </a:p>
         </p:txBody>
       </p:sp>
@@ -762,38 +772,37 @@
           <a:p>
             <a:pPr lvl="0"/>
             <a:r>
-              <a:rPr lang="en-US" smtClean="0"/>
+              <a:rPr lang="en-US"/>
               <a:t>Click to edit Master text styles</a:t>
             </a:r>
           </a:p>
           <a:p>
             <a:pPr lvl="1"/>
             <a:r>
-              <a:rPr lang="en-US" smtClean="0"/>
+              <a:rPr lang="en-US"/>
               <a:t>Second level</a:t>
             </a:r>
           </a:p>
           <a:p>
             <a:pPr lvl="2"/>
             <a:r>
-              <a:rPr lang="en-US" smtClean="0"/>
+              <a:rPr lang="en-US"/>
               <a:t>Third level</a:t>
             </a:r>
           </a:p>
           <a:p>
             <a:pPr lvl="3"/>
             <a:r>
-              <a:rPr lang="en-US" smtClean="0"/>
+              <a:rPr lang="en-US"/>
               <a:t>Fourth level</a:t>
             </a:r>
           </a:p>
           <a:p>
             <a:pPr lvl="4"/>
             <a:r>
-              <a:rPr lang="en-US" smtClean="0"/>
+              <a:rPr lang="en-US"/>
               <a:t>Fifth level</a:t>
             </a:r>
-            <a:endParaRPr lang="en-US"/>
           </a:p>
         </p:txBody>
       </p:sp>
@@ -814,7 +823,7 @@
           <a:p>
             <a:fld id="{5BCAD085-E8A6-8845-BD4E-CB4CCA059FC4}" type="datetimeFigureOut">
               <a:rPr lang="en-US" smtClean="0"/>
-              <a:t>1/27/13</a:t>
+              <a:t>8/10/26</a:t>
             </a:fld>
             <a:endParaRPr lang="en-US"/>
           </a:p>
@@ -917,10 +926,9 @@
           </a:lstStyle>
           <a:p>
             <a:r>
-              <a:rPr lang="en-US" smtClean="0"/>
+              <a:rPr lang="en-US"/>
               <a:t>Click to edit Master title style</a:t>
             </a:r>
-            <a:endParaRPr lang="en-US"/>
           </a:p>
         </p:txBody>
       </p:sp>
@@ -1037,7 +1045,7 @@
           <a:p>
             <a:pPr lvl="0"/>
             <a:r>
-              <a:rPr lang="en-US" smtClean="0"/>
+              <a:rPr lang="en-US"/>
               <a:t>Click to edit Master text styles</a:t>
             </a:r>
           </a:p>
@@ -1060,7 +1068,7 @@
           <a:p>
             <a:fld id="{5BCAD085-E8A6-8845-BD4E-CB4CCA059FC4}" type="datetimeFigureOut">
               <a:rPr lang="en-US" smtClean="0"/>
-              <a:t>1/27/13</a:t>
+              <a:t>8/10/26</a:t>
             </a:fld>
             <a:endParaRPr lang="en-US"/>
           </a:p>
@@ -1154,10 +1162,9 @@
           <a:lstStyle/>
           <a:p>
             <a:r>
-              <a:rPr lang="en-US" smtClean="0"/>
+              <a:rPr lang="en-US"/>
               <a:t>Click to edit Master title style</a:t>
             </a:r>
-            <a:endParaRPr lang="en-US"/>
           </a:p>
         </p:txBody>
       </p:sp>
@@ -1211,38 +1218,37 @@
           <a:p>
             <a:pPr lvl="0"/>
             <a:r>
-              <a:rPr lang="en-US" smtClean="0"/>
+              <a:rPr lang="en-US"/>
               <a:t>Click to edit Master text styles</a:t>
             </a:r>
           </a:p>
           <a:p>
             <a:pPr lvl="1"/>
             <a:r>
-              <a:rPr lang="en-US" smtClean="0"/>
+              <a:rPr lang="en-US"/>
               <a:t>Second level</a:t>
             </a:r>
           </a:p>
           <a:p>
             <a:pPr lvl="2"/>
             <a:r>
-              <a:rPr lang="en-US" smtClean="0"/>
+              <a:rPr lang="en-US"/>
               <a:t>Third level</a:t>
             </a:r>
           </a:p>
           <a:p>
             <a:pPr lvl="3"/>
             <a:r>
-              <a:rPr lang="en-US" smtClean="0"/>
+              <a:rPr lang="en-US"/>
               <a:t>Fourth level</a:t>
             </a:r>
           </a:p>
           <a:p>
             <a:pPr lvl="4"/>
             <a:r>
-              <a:rPr lang="en-US" smtClean="0"/>
+              <a:rPr lang="en-US"/>
               <a:t>Fifth level</a:t>
             </a:r>
-            <a:endParaRPr lang="en-US"/>
           </a:p>
         </p:txBody>
       </p:sp>
@@ -1296,38 +1302,37 @@
           <a:p>
             <a:pPr lvl="0"/>
             <a:r>
-              <a:rPr lang="en-US" smtClean="0"/>
+              <a:rPr lang="en-US"/>
               <a:t>Click to edit Master text styles</a:t>
             </a:r>
           </a:p>
           <a:p>
             <a:pPr lvl="1"/>
             <a:r>
-              <a:rPr lang="en-US" smtClean="0"/>
+              <a:rPr lang="en-US"/>
               <a:t>Second level</a:t>
             </a:r>
           </a:p>
           <a:p>
             <a:pPr lvl="2"/>
             <a:r>
-              <a:rPr lang="en-US" smtClean="0"/>
+              <a:rPr lang="en-US"/>
               <a:t>Third level</a:t>
             </a:r>
           </a:p>
           <a:p>
             <a:pPr lvl="3"/>
             <a:r>
-              <a:rPr lang="en-US" smtClean="0"/>
+              <a:rPr lang="en-US"/>
               <a:t>Fourth level</a:t>
             </a:r>
           </a:p>
           <a:p>
             <a:pPr lvl="4"/>
             <a:r>
-              <a:rPr lang="en-US" smtClean="0"/>
+              <a:rPr lang="en-US"/>
               <a:t>Fifth level</a:t>
             </a:r>
-            <a:endParaRPr lang="en-US"/>
           </a:p>
         </p:txBody>
       </p:sp>
@@ -1348,7 +1353,7 @@
           <a:p>
             <a:fld id="{5BCAD085-E8A6-8845-BD4E-CB4CCA059FC4}" type="datetimeFigureOut">
               <a:rPr lang="en-US" smtClean="0"/>
-              <a:t>1/27/13</a:t>
+              <a:t>8/10/26</a:t>
             </a:fld>
             <a:endParaRPr lang="en-US"/>
           </a:p>
@@ -1446,10 +1451,9 @@
           </a:lstStyle>
           <a:p>
             <a:r>
-              <a:rPr lang="en-US" smtClean="0"/>
+              <a:rPr lang="en-US"/>
               <a:t>Click to edit Master title style</a:t>
             </a:r>
-            <a:endParaRPr lang="en-US"/>
           </a:p>
         </p:txBody>
       </p:sp>
@@ -1512,7 +1516,7 @@
           <a:p>
             <a:pPr lvl="0"/>
             <a:r>
-              <a:rPr lang="en-US" smtClean="0"/>
+              <a:rPr lang="en-US"/>
               <a:t>Click to edit Master text styles</a:t>
             </a:r>
           </a:p>
@@ -1568,38 +1572,37 @@
           <a:p>
             <a:pPr lvl="0"/>
             <a:r>
-              <a:rPr lang="en-US" smtClean="0"/>
+              <a:rPr lang="en-US"/>
               <a:t>Click to edit Master text styles</a:t>
             </a:r>
           </a:p>
           <a:p>
             <a:pPr lvl="1"/>
             <a:r>
-              <a:rPr lang="en-US" smtClean="0"/>
+              <a:rPr lang="en-US"/>
               <a:t>Second level</a:t>
             </a:r>
           </a:p>
           <a:p>
             <a:pPr lvl="2"/>
             <a:r>
-              <a:rPr lang="en-US" smtClean="0"/>
+              <a:rPr lang="en-US"/>
               <a:t>Third level</a:t>
             </a:r>
           </a:p>
           <a:p>
             <a:pPr lvl="3"/>
             <a:r>
-              <a:rPr lang="en-US" smtClean="0"/>
+              <a:rPr lang="en-US"/>
               <a:t>Fourth level</a:t>
             </a:r>
           </a:p>
           <a:p>
             <a:pPr lvl="4"/>
             <a:r>
-              <a:rPr lang="en-US" smtClean="0"/>
+              <a:rPr lang="en-US"/>
               <a:t>Fifth level</a:t>
             </a:r>
-            <a:endParaRPr lang="en-US"/>
           </a:p>
         </p:txBody>
       </p:sp>
@@ -1662,7 +1665,7 @@
           <a:p>
             <a:pPr lvl="0"/>
             <a:r>
-              <a:rPr lang="en-US" smtClean="0"/>
+              <a:rPr lang="en-US"/>
               <a:t>Click to edit Master text styles</a:t>
             </a:r>
           </a:p>
@@ -1718,38 +1721,37 @@
           <a:p>
             <a:pPr lvl="0"/>
             <a:r>
-              <a:rPr lang="en-US" smtClean="0"/>
+              <a:rPr lang="en-US"/>
               <a:t>Click to edit Master text styles</a:t>
             </a:r>
           </a:p>
           <a:p>
             <a:pPr lvl="1"/>
             <a:r>
-              <a:rPr lang="en-US" smtClean="0"/>
+              <a:rPr lang="en-US"/>
               <a:t>Second level</a:t>
             </a:r>
           </a:p>
           <a:p>
             <a:pPr lvl="2"/>
             <a:r>
-              <a:rPr lang="en-US" smtClean="0"/>
+              <a:rPr lang="en-US"/>
               <a:t>Third level</a:t>
             </a:r>
           </a:p>
           <a:p>
             <a:pPr lvl="3"/>
             <a:r>
-              <a:rPr lang="en-US" smtClean="0"/>
+              <a:rPr lang="en-US"/>
               <a:t>Fourth level</a:t>
             </a:r>
           </a:p>
           <a:p>
             <a:pPr lvl="4"/>
             <a:r>
-              <a:rPr lang="en-US" smtClean="0"/>
+              <a:rPr lang="en-US"/>
               <a:t>Fifth level</a:t>
             </a:r>
-            <a:endParaRPr lang="en-US"/>
           </a:p>
         </p:txBody>
       </p:sp>
@@ -1770,7 +1772,7 @@
           <a:p>
             <a:fld id="{5BCAD085-E8A6-8845-BD4E-CB4CCA059FC4}" type="datetimeFigureOut">
               <a:rPr lang="en-US" smtClean="0"/>
-              <a:t>1/27/13</a:t>
+              <a:t>8/10/26</a:t>
             </a:fld>
             <a:endParaRPr lang="en-US"/>
           </a:p>
@@ -1864,10 +1866,9 @@
           <a:lstStyle/>
           <a:p>
             <a:r>
-              <a:rPr lang="en-US" smtClean="0"/>
+              <a:rPr lang="en-US"/>
               <a:t>Click to edit Master title style</a:t>
             </a:r>
-            <a:endParaRPr lang="en-US"/>
           </a:p>
         </p:txBody>
       </p:sp>
@@ -1888,7 +1889,7 @@
           <a:p>
             <a:fld id="{5BCAD085-E8A6-8845-BD4E-CB4CCA059FC4}" type="datetimeFigureOut">
               <a:rPr lang="en-US" smtClean="0"/>
-              <a:t>1/27/13</a:t>
+              <a:t>8/10/26</a:t>
             </a:fld>
             <a:endParaRPr lang="en-US"/>
           </a:p>
@@ -1983,7 +1984,7 @@
           <a:p>
             <a:fld id="{5BCAD085-E8A6-8845-BD4E-CB4CCA059FC4}" type="datetimeFigureOut">
               <a:rPr lang="en-US" smtClean="0"/>
-              <a:t>1/27/13</a:t>
+              <a:t>8/10/26</a:t>
             </a:fld>
             <a:endParaRPr lang="en-US"/>
           </a:p>
@@ -2086,10 +2087,9 @@
           </a:lstStyle>
           <a:p>
             <a:r>
-              <a:rPr lang="en-US" smtClean="0"/>
+              <a:rPr lang="en-US"/>
               <a:t>Click to edit Master title style</a:t>
             </a:r>
-            <a:endParaRPr lang="en-US"/>
           </a:p>
         </p:txBody>
       </p:sp>
@@ -2143,38 +2143,37 @@
           <a:p>
             <a:pPr lvl="0"/>
             <a:r>
-              <a:rPr lang="en-US" smtClean="0"/>
+              <a:rPr lang="en-US"/>
               <a:t>Click to edit Master text styles</a:t>
             </a:r>
           </a:p>
           <a:p>
             <a:pPr lvl="1"/>
             <a:r>
-              <a:rPr lang="en-US" smtClean="0"/>
+              <a:rPr lang="en-US"/>
               <a:t>Second level</a:t>
             </a:r>
           </a:p>
           <a:p>
             <a:pPr lvl="2"/>
             <a:r>
-              <a:rPr lang="en-US" smtClean="0"/>
+              <a:rPr lang="en-US"/>
               <a:t>Third level</a:t>
             </a:r>
           </a:p>
           <a:p>
             <a:pPr lvl="3"/>
             <a:r>
-              <a:rPr lang="en-US" smtClean="0"/>
+              <a:rPr lang="en-US"/>
               <a:t>Fourth level</a:t>
             </a:r>
           </a:p>
           <a:p>
             <a:pPr lvl="4"/>
             <a:r>
-              <a:rPr lang="en-US" smtClean="0"/>
+              <a:rPr lang="en-US"/>
               <a:t>Fifth level</a:t>
             </a:r>
-            <a:endParaRPr lang="en-US"/>
           </a:p>
         </p:txBody>
       </p:sp>
@@ -2237,7 +2236,7 @@
           <a:p>
             <a:pPr lvl="0"/>
             <a:r>
-              <a:rPr lang="en-US" smtClean="0"/>
+              <a:rPr lang="en-US"/>
               <a:t>Click to edit Master text styles</a:t>
             </a:r>
           </a:p>
@@ -2260,7 +2259,7 @@
           <a:p>
             <a:fld id="{5BCAD085-E8A6-8845-BD4E-CB4CCA059FC4}" type="datetimeFigureOut">
               <a:rPr lang="en-US" smtClean="0"/>
-              <a:t>1/27/13</a:t>
+              <a:t>8/10/26</a:t>
             </a:fld>
             <a:endParaRPr lang="en-US"/>
           </a:p>
@@ -2363,10 +2362,9 @@
           </a:lstStyle>
           <a:p>
             <a:r>
-              <a:rPr lang="en-US" smtClean="0"/>
+              <a:rPr lang="en-US"/>
               <a:t>Click to edit Master title style</a:t>
             </a:r>
-            <a:endParaRPr lang="en-US"/>
           </a:p>
         </p:txBody>
       </p:sp>
@@ -2490,7 +2488,7 @@
           <a:p>
             <a:pPr lvl="0"/>
             <a:r>
-              <a:rPr lang="en-US" smtClean="0"/>
+              <a:rPr lang="en-US"/>
               <a:t>Click to edit Master text styles</a:t>
             </a:r>
           </a:p>
@@ -2513,7 +2511,7 @@
           <a:p>
             <a:fld id="{5BCAD085-E8A6-8845-BD4E-CB4CCA059FC4}" type="datetimeFigureOut">
               <a:rPr lang="en-US" smtClean="0"/>
-              <a:t>1/27/13</a:t>
+              <a:t>8/10/26</a:t>
             </a:fld>
             <a:endParaRPr lang="en-US"/>
           </a:p>
@@ -2622,10 +2620,9 @@
           <a:lstStyle/>
           <a:p>
             <a:r>
-              <a:rPr lang="en-US" smtClean="0"/>
+              <a:rPr lang="en-US"/>
               <a:t>Click to edit Master title style</a:t>
             </a:r>
-            <a:endParaRPr lang="en-US"/>
           </a:p>
         </p:txBody>
       </p:sp>
@@ -2656,38 +2653,37 @@
           <a:p>
             <a:pPr lvl="0"/>
             <a:r>
-              <a:rPr lang="en-US" smtClean="0"/>
+              <a:rPr lang="en-US"/>
               <a:t>Click to edit Master text styles</a:t>
             </a:r>
           </a:p>
           <a:p>
             <a:pPr lvl="1"/>
             <a:r>
-              <a:rPr lang="en-US" smtClean="0"/>
+              <a:rPr lang="en-US"/>
               <a:t>Second level</a:t>
             </a:r>
           </a:p>
           <a:p>
             <a:pPr lvl="2"/>
             <a:r>
-              <a:rPr lang="en-US" smtClean="0"/>
+              <a:rPr lang="en-US"/>
               <a:t>Third level</a:t>
             </a:r>
           </a:p>
           <a:p>
             <a:pPr lvl="3"/>
             <a:r>
-              <a:rPr lang="en-US" smtClean="0"/>
+              <a:rPr lang="en-US"/>
               <a:t>Fourth level</a:t>
             </a:r>
           </a:p>
           <a:p>
             <a:pPr lvl="4"/>
             <a:r>
-              <a:rPr lang="en-US" smtClean="0"/>
+              <a:rPr lang="en-US"/>
               <a:t>Fifth level</a:t>
             </a:r>
-            <a:endParaRPr lang="en-US"/>
           </a:p>
         </p:txBody>
       </p:sp>
@@ -2726,7 +2722,7 @@
           <a:p>
             <a:fld id="{5BCAD085-E8A6-8845-BD4E-CB4CCA059FC4}" type="datetimeFigureOut">
               <a:rPr lang="en-US" smtClean="0"/>
-              <a:t>1/27/13</a:t>
+              <a:t>8/10/26</a:t>
             </a:fld>
             <a:endParaRPr lang="en-US"/>
           </a:p>
@@ -3085,7 +3081,7 @@
 </file>
 
 <file path=ppt/slides/slide1.xml><?xml version="1.0" encoding="utf-8"?>
-<p:sld xmlns:a="http://schemas.openxmlformats.org/drawingml/2006/main" xmlns:p="http://schemas.openxmlformats.org/presentationml/2006/main" xmlns:r="http://schemas.openxmlformats.org/officeDocument/2006/relationships">
+<p:sld xmlns:a="http://schemas.openxmlformats.org/drawingml/2006/main" xmlns:r="http://schemas.openxmlformats.org/officeDocument/2006/relationships" xmlns:p="http://schemas.openxmlformats.org/presentationml/2006/main">
   <p:cSld>
     <p:bg>
       <p:bgPr>
@@ -3101,7 +3097,14 @@
         <p:cNvGrpSpPr/>
         <p:nvPr/>
       </p:nvGrpSpPr>
-      <p:grpSpPr/>
+      <p:grpSpPr>
+        <a:xfrm>
+          <a:off x="0" y="0"/>
+          <a:ext cx="0" cy="0"/>
+          <a:chOff x="0" y="0"/>
+          <a:chExt cx="0" cy="0"/>
+        </a:xfrm>
+      </p:grpSpPr>
       <p:sp>
         <p:nvSpPr>
           <p:cNvPr id="2" name="Rectangle 1"/>
@@ -3110,8 +3113,8 @@
         </p:nvSpPr>
         <p:spPr>
           <a:xfrm>
-            <a:off x="0" y="0"/>
-            <a:ext cx="12188952" cy="600000"/>
+            <a:off x="0" y="-1"/>
+            <a:ext cx="12188952" cy="1005841"/>
           </a:xfrm>
           <a:prstGeom prst="rect">
             <a:avLst/>
@@ -3149,24 +3152,20 @@
               </a:defRPr>
             </a:pPr>
             <a:r>
-              <a:t>Document Processing Automation</a:t>
-            </a:r>
-            <a:br/>
-            <a:r>
-              <a:t>Proof of Concept</a:t>
-            </a:r>
-          </a:p>
-        </p:txBody>
-      </p:sp>
-      <p:sp>
-        <p:nvSpPr>
-          <p:cNvPr id="3" name="TextBox 2"/>
+              <a:t>Document Processing POC — Findings</a:t>
+            </a:r>
+          </a:p>
+        </p:txBody>
+      </p:sp>
+      <p:sp>
+        <p:nvSpPr>
+          <p:cNvPr id="4" name="TextBox 3"/>
           <p:cNvSpPr txBox="1"/>
           <p:nvPr/>
         </p:nvSpPr>
         <p:spPr>
           <a:xfrm>
-            <a:off x="731520" y="1005840"/>
+            <a:off x="731520" y="1729196"/>
             <a:ext cx="10515600" cy="548640"/>
           </a:xfrm>
           <a:prstGeom prst="rect">
@@ -3181,49 +3180,14 @@
           <a:lstStyle/>
           <a:p>
             <a:pPr>
-              <a:defRPr sz="2200">
+              <a:defRPr sz="2000">
                 <a:solidFill>
                   <a:srgbClr val="323232"/>
                 </a:solidFill>
               </a:defRPr>
             </a:pPr>
             <a:r>
-              <a:t>• Automate processing of Excel, PDF and Word documents.</a:t>
-            </a:r>
-          </a:p>
-        </p:txBody>
-      </p:sp>
-      <p:sp>
-        <p:nvSpPr>
-          <p:cNvPr id="4" name="TextBox 3"/>
-          <p:cNvSpPr txBox="1"/>
-          <p:nvPr/>
-        </p:nvSpPr>
-        <p:spPr>
-          <a:xfrm>
-            <a:off x="731520" y="1600200"/>
-            <a:ext cx="10515600" cy="548640"/>
-          </a:xfrm>
-          <a:prstGeom prst="rect">
-            <a:avLst/>
-          </a:prstGeom>
-          <a:noFill/>
-        </p:spPr>
-        <p:txBody>
-          <a:bodyPr wrap="none">
-            <a:spAutoFit/>
-          </a:bodyPr>
-          <a:lstStyle/>
-          <a:p>
-            <a:pPr>
-              <a:defRPr sz="2200">
-                <a:solidFill>
-                  <a:srgbClr val="323232"/>
-                </a:solidFill>
-              </a:defRPr>
-            </a:pPr>
-            <a:r>
-              <a:t>• Validate business content with configurable rules.</a:t>
+              <a:t>• Confirm Excel, Word &amp; PDF automation on an owned server + web app (not Matterway-only).</a:t>
             </a:r>
           </a:p>
         </p:txBody>
@@ -3251,14 +3215,14 @@
           <a:lstStyle/>
           <a:p>
             <a:pPr>
-              <a:defRPr sz="2200">
+              <a:defRPr sz="2000">
                 <a:solidFill>
                   <a:srgbClr val="323232"/>
                 </a:solidFill>
               </a:defRPr>
             </a:pPr>
             <a:r>
-              <a:t>• Reduce manual effort and improve consistency.</a:t>
+              <a:t>• Validate hosting path: API, logging, Windows/IIS deployment.</a:t>
             </a:r>
           </a:p>
         </p:txBody>
@@ -3272,7 +3236,7 @@
 </file>
 
 <file path=ppt/slides/slide2.xml><?xml version="1.0" encoding="utf-8"?>
-<p:sld xmlns:a="http://schemas.openxmlformats.org/drawingml/2006/main" xmlns:p="http://schemas.openxmlformats.org/presentationml/2006/main" xmlns:r="http://schemas.openxmlformats.org/officeDocument/2006/relationships">
+<p:sld xmlns:a="http://schemas.openxmlformats.org/drawingml/2006/main" xmlns:r="http://schemas.openxmlformats.org/officeDocument/2006/relationships" xmlns:p="http://schemas.openxmlformats.org/presentationml/2006/main">
   <p:cSld>
     <p:bg>
       <p:bgPr>
@@ -3288,7 +3252,14 @@
         <p:cNvGrpSpPr/>
         <p:nvPr/>
       </p:nvGrpSpPr>
-      <p:grpSpPr/>
+      <p:grpSpPr>
+        <a:xfrm>
+          <a:off x="0" y="0"/>
+          <a:ext cx="0" cy="0"/>
+          <a:chOff x="0" y="0"/>
+          <a:chExt cx="0" cy="0"/>
+        </a:xfrm>
+      </p:grpSpPr>
       <p:sp>
         <p:nvSpPr>
           <p:cNvPr id="2" name="Rectangle 1"/>
@@ -3336,7 +3307,7 @@
               </a:defRPr>
             </a:pPr>
             <a:r>
-              <a:t>Business Need &amp; POC Scope</a:t>
+              <a:t>Objective &amp; Scope</a:t>
             </a:r>
           </a:p>
         </p:txBody>
@@ -3364,14 +3335,14 @@
           <a:lstStyle/>
           <a:p>
             <a:pPr>
-              <a:defRPr sz="2200">
+              <a:defRPr sz="2000">
                 <a:solidFill>
                   <a:srgbClr val="323232"/>
                 </a:solidFill>
               </a:defRPr>
             </a:pPr>
             <a:r>
-              <a:t>• Business need: reduce manual validation and repetitive document updates.</a:t>
+              <a:t>• Prove server-side Excel read/write and PDF/Word validation at scale.</a:t>
             </a:r>
           </a:p>
         </p:txBody>
@@ -3399,14 +3370,14 @@
           <a:lstStyle/>
           <a:p>
             <a:pPr>
-              <a:defRPr sz="2200">
+              <a:defRPr sz="2000">
                 <a:solidFill>
                   <a:srgbClr val="323232"/>
                 </a:solidFill>
               </a:defRPr>
             </a:pPr>
             <a:r>
-              <a:t>• In Scope: Excel processing, PDF/Word validation, server path processing, downloads.</a:t>
+              <a:t>• In scope: upload, server path, downloads, auto-download, in-place Excel, logs.</a:t>
             </a:r>
           </a:p>
         </p:txBody>
@@ -3434,14 +3405,14 @@
           <a:lstStyle/>
           <a:p>
             <a:pPr>
-              <a:defRPr sz="2200">
+              <a:defRPr sz="2000">
                 <a:solidFill>
                   <a:srgbClr val="323232"/>
                 </a:solidFill>
               </a:defRPr>
             </a:pPr>
             <a:r>
-              <a:t>• Future: Authentication, audit logs, scheduling and enterprise security.</a:t>
+              <a:t>• Out of scope: full Matterway SCR scrub &amp; CAL allocation products (port in next phase).</a:t>
             </a:r>
           </a:p>
         </p:txBody>
@@ -3455,7 +3426,7 @@
 </file>
 
 <file path=ppt/slides/slide3.xml><?xml version="1.0" encoding="utf-8"?>
-<p:sld xmlns:a="http://schemas.openxmlformats.org/drawingml/2006/main" xmlns:p="http://schemas.openxmlformats.org/presentationml/2006/main" xmlns:r="http://schemas.openxmlformats.org/officeDocument/2006/relationships">
+<p:sld xmlns:a="http://schemas.openxmlformats.org/drawingml/2006/main" xmlns:r="http://schemas.openxmlformats.org/officeDocument/2006/relationships" xmlns:p="http://schemas.openxmlformats.org/presentationml/2006/main">
   <p:cSld>
     <p:bg>
       <p:bgPr>
@@ -3471,7 +3442,14 @@
         <p:cNvGrpSpPr/>
         <p:nvPr/>
       </p:nvGrpSpPr>
-      <p:grpSpPr/>
+      <p:grpSpPr>
+        <a:xfrm>
+          <a:off x="0" y="0"/>
+          <a:ext cx="0" cy="0"/>
+          <a:chOff x="0" y="0"/>
+          <a:chExt cx="0" cy="0"/>
+        </a:xfrm>
+      </p:grpSpPr>
       <p:sp>
         <p:nvSpPr>
           <p:cNvPr id="2" name="Rectangle 1"/>
@@ -3532,8 +3510,8 @@
         </p:nvSpPr>
         <p:spPr>
           <a:xfrm>
-            <a:off x="731520" y="1005840"/>
-            <a:ext cx="10515600" cy="548640"/>
+            <a:off x="550000" y="680000"/>
+            <a:ext cx="11000000" cy="380000"/>
           </a:xfrm>
           <a:prstGeom prst="rect">
             <a:avLst/>
@@ -3541,304 +3519,48 @@
           <a:noFill/>
         </p:spPr>
         <p:txBody>
-          <a:bodyPr wrap="none">
+          <a:bodyPr wrap="square">
             <a:spAutoFit/>
           </a:bodyPr>
           <a:lstStyle/>
           <a:p>
-            <a:pPr>
-              <a:defRPr sz="2200">
+            <a:pPr algn="l">
+              <a:defRPr sz="1300">
                 <a:solidFill>
-                  <a:srgbClr val="323232"/>
+                  <a:srgbClr val="374151"/>
                 </a:solidFill>
               </a:defRPr>
             </a:pPr>
             <a:r>
-              <a:t>• User → React UI → FastAPI → Excel/PDF/Word Services → Results</a:t>
-            </a:r>
-          </a:p>
-        </p:txBody>
-      </p:sp>
-      <p:sp>
-        <p:nvSpPr>
-          <p:cNvPr id="4" name="TextBox 3"/>
-          <p:cNvSpPr txBox="1"/>
+              <a:t>Production: browser → IIS (HTTPS) → React UI + FastAPI. Each document type is handled by a dedicated service; Excel outputs stay available for download.</a:t>
+            </a:r>
+          </a:p>
+        </p:txBody>
+      </p:sp>
+      <p:pic>
+        <p:nvPicPr>
+          <p:cNvPr id="4" name="Picture 3" descr="architecture_diagram.png"/>
+          <p:cNvPicPr>
+            <a:picLocks noChangeAspect="1"/>
+          </p:cNvPicPr>
           <p:nvPr/>
-        </p:nvSpPr>
+        </p:nvPicPr>
+        <p:blipFill>
+          <a:blip r:embed="rId2"/>
+          <a:stretch>
+            <a:fillRect/>
+          </a:stretch>
+        </p:blipFill>
         <p:spPr>
           <a:xfrm>
-            <a:off x="731520" y="1600200"/>
-            <a:ext cx="10515600" cy="548640"/>
+            <a:off x="256032" y="1143000"/>
+            <a:ext cx="11109960" cy="5433611"/>
           </a:xfrm>
           <a:prstGeom prst="rect">
             <a:avLst/>
           </a:prstGeom>
-          <a:noFill/>
         </p:spPr>
-        <p:txBody>
-          <a:bodyPr wrap="none">
-            <a:spAutoFit/>
-          </a:bodyPr>
-          <a:lstStyle/>
-          <a:p>
-            <a:pPr>
-              <a:defRPr sz="2200">
-                <a:solidFill>
-                  <a:srgbClr val="323232"/>
-                </a:solidFill>
-              </a:defRPr>
-            </a:pPr>
-            <a:r>
-              <a:t>• Modular service design for easy extension.</a:t>
-            </a:r>
-          </a:p>
-        </p:txBody>
-      </p:sp>
-      <p:sp>
-        <p:nvSpPr>
-          <p:cNvPr id="5" name="TextBox 4"/>
-          <p:cNvSpPr txBox="1"/>
-          <p:nvPr/>
-        </p:nvSpPr>
-        <p:spPr>
-          <a:xfrm>
-            <a:off x="731520" y="2194560"/>
-            <a:ext cx="10515600" cy="548640"/>
-          </a:xfrm>
-          <a:prstGeom prst="rect">
-            <a:avLst/>
-          </a:prstGeom>
-          <a:noFill/>
-        </p:spPr>
-        <p:txBody>
-          <a:bodyPr wrap="none">
-            <a:spAutoFit/>
-          </a:bodyPr>
-          <a:lstStyle/>
-          <a:p>
-            <a:pPr>
-              <a:defRPr sz="2200">
-                <a:solidFill>
-                  <a:srgbClr val="323232"/>
-                </a:solidFill>
-              </a:defRPr>
-            </a:pPr>
-            <a:r>
-              <a:t>• Supports upload or configured server path.</a:t>
-            </a:r>
-          </a:p>
-        </p:txBody>
-      </p:sp>
-      <p:sp>
-        <p:nvSpPr>
-          <p:cNvPr id="6" name="Rounded Rectangle 5"/>
-          <p:cNvSpPr/>
-          <p:nvPr/>
-        </p:nvSpPr>
-        <p:spPr>
-          <a:xfrm>
-            <a:off x="731520" y="4114800"/>
-            <a:ext cx="1371600" cy="548640"/>
-          </a:xfrm>
-          <a:prstGeom prst="roundRect">
-            <a:avLst/>
-          </a:prstGeom>
-          <a:solidFill>
-            <a:srgbClr val="DCEBFA"/>
-          </a:solidFill>
-        </p:spPr>
-        <p:style>
-          <a:lnRef idx="1">
-            <a:schemeClr val="accent1"/>
-          </a:lnRef>
-          <a:fillRef idx="3">
-            <a:schemeClr val="accent1"/>
-          </a:fillRef>
-          <a:effectRef idx="2">
-            <a:schemeClr val="accent1"/>
-          </a:effectRef>
-          <a:fontRef idx="minor">
-            <a:schemeClr val="lt1"/>
-          </a:fontRef>
-        </p:style>
-        <p:txBody>
-          <a:bodyPr rtlCol="0" anchor="ctr"/>
-          <a:lstStyle/>
-          <a:p>
-            <a:r>
-              <a:t>User</a:t>
-            </a:r>
-          </a:p>
-        </p:txBody>
-      </p:sp>
-      <p:sp>
-        <p:nvSpPr>
-          <p:cNvPr id="7" name="Rounded Rectangle 6"/>
-          <p:cNvSpPr/>
-          <p:nvPr/>
-        </p:nvSpPr>
-        <p:spPr>
-          <a:xfrm>
-            <a:off x="2743200" y="4114800"/>
-            <a:ext cx="1371600" cy="548640"/>
-          </a:xfrm>
-          <a:prstGeom prst="roundRect">
-            <a:avLst/>
-          </a:prstGeom>
-          <a:solidFill>
-            <a:srgbClr val="DCEBFA"/>
-          </a:solidFill>
-        </p:spPr>
-        <p:style>
-          <a:lnRef idx="1">
-            <a:schemeClr val="accent1"/>
-          </a:lnRef>
-          <a:fillRef idx="3">
-            <a:schemeClr val="accent1"/>
-          </a:fillRef>
-          <a:effectRef idx="2">
-            <a:schemeClr val="accent1"/>
-          </a:effectRef>
-          <a:fontRef idx="minor">
-            <a:schemeClr val="lt1"/>
-          </a:fontRef>
-        </p:style>
-        <p:txBody>
-          <a:bodyPr rtlCol="0" anchor="ctr"/>
-          <a:lstStyle/>
-          <a:p>
-            <a:r>
-              <a:t>React</a:t>
-            </a:r>
-          </a:p>
-        </p:txBody>
-      </p:sp>
-      <p:sp>
-        <p:nvSpPr>
-          <p:cNvPr id="8" name="Rounded Rectangle 7"/>
-          <p:cNvSpPr/>
-          <p:nvPr/>
-        </p:nvSpPr>
-        <p:spPr>
-          <a:xfrm>
-            <a:off x="4754880" y="4114800"/>
-            <a:ext cx="1371600" cy="548640"/>
-          </a:xfrm>
-          <a:prstGeom prst="roundRect">
-            <a:avLst/>
-          </a:prstGeom>
-          <a:solidFill>
-            <a:srgbClr val="DCEBFA"/>
-          </a:solidFill>
-        </p:spPr>
-        <p:style>
-          <a:lnRef idx="1">
-            <a:schemeClr val="accent1"/>
-          </a:lnRef>
-          <a:fillRef idx="3">
-            <a:schemeClr val="accent1"/>
-          </a:fillRef>
-          <a:effectRef idx="2">
-            <a:schemeClr val="accent1"/>
-          </a:effectRef>
-          <a:fontRef idx="minor">
-            <a:schemeClr val="lt1"/>
-          </a:fontRef>
-        </p:style>
-        <p:txBody>
-          <a:bodyPr rtlCol="0" anchor="ctr"/>
-          <a:lstStyle/>
-          <a:p>
-            <a:r>
-              <a:t>FastAPI</a:t>
-            </a:r>
-          </a:p>
-        </p:txBody>
-      </p:sp>
-      <p:sp>
-        <p:nvSpPr>
-          <p:cNvPr id="9" name="Rounded Rectangle 8"/>
-          <p:cNvSpPr/>
-          <p:nvPr/>
-        </p:nvSpPr>
-        <p:spPr>
-          <a:xfrm>
-            <a:off x="6766560" y="4114800"/>
-            <a:ext cx="1371600" cy="548640"/>
-          </a:xfrm>
-          <a:prstGeom prst="roundRect">
-            <a:avLst/>
-          </a:prstGeom>
-          <a:solidFill>
-            <a:srgbClr val="DCEBFA"/>
-          </a:solidFill>
-        </p:spPr>
-        <p:style>
-          <a:lnRef idx="1">
-            <a:schemeClr val="accent1"/>
-          </a:lnRef>
-          <a:fillRef idx="3">
-            <a:schemeClr val="accent1"/>
-          </a:fillRef>
-          <a:effectRef idx="2">
-            <a:schemeClr val="accent1"/>
-          </a:effectRef>
-          <a:fontRef idx="minor">
-            <a:schemeClr val="lt1"/>
-          </a:fontRef>
-        </p:style>
-        <p:txBody>
-          <a:bodyPr rtlCol="0" anchor="ctr"/>
-          <a:lstStyle/>
-          <a:p>
-            <a:r>
-              <a:t>Processors</a:t>
-            </a:r>
-          </a:p>
-        </p:txBody>
-      </p:sp>
-      <p:sp>
-        <p:nvSpPr>
-          <p:cNvPr id="10" name="Rounded Rectangle 9"/>
-          <p:cNvSpPr/>
-          <p:nvPr/>
-        </p:nvSpPr>
-        <p:spPr>
-          <a:xfrm>
-            <a:off x="8778240" y="4114800"/>
-            <a:ext cx="1371600" cy="548640"/>
-          </a:xfrm>
-          <a:prstGeom prst="roundRect">
-            <a:avLst/>
-          </a:prstGeom>
-          <a:solidFill>
-            <a:srgbClr val="DCEBFA"/>
-          </a:solidFill>
-        </p:spPr>
-        <p:style>
-          <a:lnRef idx="1">
-            <a:schemeClr val="accent1"/>
-          </a:lnRef>
-          <a:fillRef idx="3">
-            <a:schemeClr val="accent1"/>
-          </a:fillRef>
-          <a:effectRef idx="2">
-            <a:schemeClr val="accent1"/>
-          </a:effectRef>
-          <a:fontRef idx="minor">
-            <a:schemeClr val="lt1"/>
-          </a:fontRef>
-        </p:style>
-        <p:txBody>
-          <a:bodyPr rtlCol="0" anchor="ctr"/>
-          <a:lstStyle/>
-          <a:p>
-            <a:r>
-              <a:t>Results</a:t>
-            </a:r>
-          </a:p>
-        </p:txBody>
-      </p:sp>
+      </p:pic>
     </p:spTree>
   </p:cSld>
   <p:clrMapOvr>
@@ -3848,7 +3570,7 @@
 </file>
 
 <file path=ppt/slides/slide4.xml><?xml version="1.0" encoding="utf-8"?>
-<p:sld xmlns:a="http://schemas.openxmlformats.org/drawingml/2006/main" xmlns:p="http://schemas.openxmlformats.org/presentationml/2006/main" xmlns:r="http://schemas.openxmlformats.org/officeDocument/2006/relationships">
+<p:sld xmlns:a="http://schemas.openxmlformats.org/drawingml/2006/main" xmlns:r="http://schemas.openxmlformats.org/officeDocument/2006/relationships" xmlns:p="http://schemas.openxmlformats.org/presentationml/2006/main">
   <p:cSld>
     <p:bg>
       <p:bgPr>
@@ -3864,7 +3586,14 @@
         <p:cNvGrpSpPr/>
         <p:nvPr/>
       </p:nvGrpSpPr>
-      <p:grpSpPr/>
+      <p:grpSpPr>
+        <a:xfrm>
+          <a:off x="0" y="0"/>
+          <a:ext cx="0" cy="0"/>
+          <a:chOff x="0" y="0"/>
+          <a:chExt cx="0" cy="0"/>
+        </a:xfrm>
+      </p:grpSpPr>
       <p:sp>
         <p:nvSpPr>
           <p:cNvPr id="2" name="Rectangle 1"/>
@@ -3912,7 +3641,7 @@
               </a:defRPr>
             </a:pPr>
             <a:r>
-              <a:t>Key Capabilities Demonstrated</a:t>
+              <a:t>Capabilities &amp; Deliverables</a:t>
             </a:r>
           </a:p>
         </p:txBody>
@@ -3940,14 +3669,14 @@
           <a:lstStyle/>
           <a:p>
             <a:pPr>
-              <a:defRPr sz="2200">
+              <a:defRPr sz="2000">
                 <a:solidFill>
                   <a:srgbClr val="323232"/>
                 </a:solidFill>
               </a:defRPr>
             </a:pPr>
             <a:r>
-              <a:t>• Excel: Add/Update POC Status, highlight FALSE/NA, create Name &amp; SSN sheet.</a:t>
+              <a:t>• Excel: POC Status, FALSE/NA highlights, Name/SSN tab; .xlsx/.xls; processed file kept for download.</a:t>
             </a:r>
           </a:p>
         </p:txBody>
@@ -3975,14 +3704,14 @@
           <a:lstStyle/>
           <a:p>
             <a:pPr>
-              <a:defRPr sz="2200">
+              <a:defRPr sz="2000">
                 <a:solidFill>
                   <a:srgbClr val="323232"/>
                 </a:solidFill>
               </a:defRPr>
             </a:pPr>
             <a:r>
-              <a:t>• PDF &amp; Word: Extract text and validate required headings/questions.</a:t>
+              <a:t>• PDF/Word: PASS/FAIL and missing required phrases; metrics on result screen.</a:t>
             </a:r>
           </a:p>
         </p:txBody>
@@ -4010,14 +3739,14 @@
           <a:lstStyle/>
           <a:p>
             <a:pPr>
-              <a:defRPr sz="2200">
+              <a:defRPr sz="2000">
                 <a:solidFill>
                   <a:srgbClr val="323232"/>
                 </a:solidFill>
               </a:defRPr>
             </a:pPr>
             <a:r>
-              <a:t>• Large file testing and optional in-place workbook update.</a:t>
+              <a:t>• Large files tested on server; upload copy removed after process; optional in-place workbook update.</a:t>
             </a:r>
           </a:p>
         </p:txBody>
@@ -4031,23 +3760,22 @@
 </file>
 
 <file path=ppt/slides/slide5.xml><?xml version="1.0" encoding="utf-8"?>
-<p:sld xmlns:a="http://schemas.openxmlformats.org/drawingml/2006/main" xmlns:p="http://schemas.openxmlformats.org/presentationml/2006/main" xmlns:r="http://schemas.openxmlformats.org/officeDocument/2006/relationships">
+<p:sld xmlns:a="http://schemas.openxmlformats.org/drawingml/2006/main" xmlns:r="http://schemas.openxmlformats.org/officeDocument/2006/relationships" xmlns:p="http://schemas.openxmlformats.org/presentationml/2006/main">
   <p:cSld>
-    <p:bg>
-      <p:bgPr>
-        <a:solidFill>
-          <a:srgbClr val="F5F8FC"/>
-        </a:solidFill>
-        <a:effectLst/>
-      </p:bgPr>
-    </p:bg>
     <p:spTree>
       <p:nvGrpSpPr>
         <p:cNvPr id="1" name=""/>
         <p:cNvGrpSpPr/>
         <p:nvPr/>
       </p:nvGrpSpPr>
-      <p:grpSpPr/>
+      <p:grpSpPr>
+        <a:xfrm>
+          <a:off x="0" y="0"/>
+          <a:ext cx="0" cy="0"/>
+          <a:chOff x="0" y="0"/>
+          <a:chExt cx="0" cy="0"/>
+        </a:xfrm>
+      </p:grpSpPr>
       <p:sp>
         <p:nvSpPr>
           <p:cNvPr id="2" name="Rectangle 1"/>
@@ -4056,14 +3784,14 @@
         </p:nvSpPr>
         <p:spPr>
           <a:xfrm>
-            <a:off x="0" y="0"/>
+            <a:off x="0" y="308758"/>
             <a:ext cx="12188952" cy="600000"/>
           </a:xfrm>
           <a:prstGeom prst="rect">
             <a:avLst/>
           </a:prstGeom>
           <a:solidFill>
-            <a:srgbClr val="8E44AD"/>
+            <a:srgbClr val="E67E22"/>
           </a:solidFill>
           <a:ln>
             <a:noFill/>
@@ -4095,21 +3823,29 @@
               </a:defRPr>
             </a:pPr>
             <a:r>
-              <a:t>POC Outcomes</a:t>
-            </a:r>
-          </a:p>
-        </p:txBody>
-      </p:sp>
-      <p:sp>
-        <p:nvSpPr>
-          <p:cNvPr id="3" name="TextBox 2"/>
+              <a:rPr lang="en-US" dirty="0"/>
+              <a:t>Challenges &amp; Learning</a:t>
+            </a:r>
+            <a:endParaRPr dirty="0"/>
+          </a:p>
+        </p:txBody>
+      </p:sp>
+      <p:sp>
+        <p:nvSpPr>
+          <p:cNvPr id="7" name="TextBox 6">
+            <a:extLst>
+              <a:ext uri="{FF2B5EF4-FFF2-40B4-BE49-F238E27FC236}">
+                <a16:creationId xmlns:a16="http://schemas.microsoft.com/office/drawing/2014/main" id="{E11575E6-B30F-3BFB-A8FA-B41304794D21}"/>
+              </a:ext>
+            </a:extLst>
+          </p:cNvPr>
           <p:cNvSpPr txBox="1"/>
           <p:nvPr/>
         </p:nvSpPr>
         <p:spPr>
           <a:xfrm>
-            <a:off x="731520" y="1005840"/>
-            <a:ext cx="10515600" cy="548640"/>
+            <a:off x="718457" y="1276005"/>
+            <a:ext cx="6139542" cy="1477328"/>
           </a:xfrm>
           <a:prstGeom prst="rect">
             <a:avLst/>
@@ -4117,90 +3853,58 @@
           <a:noFill/>
         </p:spPr>
         <p:txBody>
-          <a:bodyPr wrap="none">
+          <a:bodyPr wrap="square">
             <a:spAutoFit/>
           </a:bodyPr>
           <a:lstStyle/>
           <a:p>
-            <a:pPr>
-              <a:defRPr sz="2200">
-                <a:solidFill>
-                  <a:srgbClr val="323232"/>
-                </a:solidFill>
-              </a:defRPr>
+            <a:pPr marL="342900" lvl="0" indent="-342900">
+              <a:buFont typeface="Arial" panose="020B0604020202020204" pitchFamily="34" charset="0"/>
+              <a:buChar char="•"/>
             </a:pPr>
             <a:r>
-              <a:t>• Successfully processed representative Excel, PDF and Word files.</a:t>
-            </a:r>
-          </a:p>
-        </p:txBody>
-      </p:sp>
-      <p:sp>
-        <p:nvSpPr>
-          <p:cNvPr id="4" name="TextBox 3"/>
-          <p:cNvSpPr txBox="1"/>
-          <p:nvPr/>
-        </p:nvSpPr>
-        <p:spPr>
-          <a:xfrm>
-            <a:off x="731520" y="1600200"/>
-            <a:ext cx="10515600" cy="548640"/>
-          </a:xfrm>
-          <a:prstGeom prst="rect">
-            <a:avLst/>
-          </a:prstGeom>
-          <a:noFill/>
-        </p:spPr>
-        <p:txBody>
-          <a:bodyPr wrap="none">
-            <a:spAutoFit/>
-          </a:bodyPr>
-          <a:lstStyle/>
-          <a:p>
-            <a:pPr>
-              <a:defRPr sz="2200">
-                <a:solidFill>
-                  <a:srgbClr val="323232"/>
-                </a:solidFill>
-              </a:defRPr>
+              <a:rPr lang="en-IN" dirty="0"/>
+              <a:t>Excel formatting preservation </a:t>
+            </a:r>
+          </a:p>
+          <a:p>
+            <a:pPr marL="342900" lvl="0" indent="-342900">
+              <a:buFont typeface="Arial" panose="020B0604020202020204" pitchFamily="34" charset="0"/>
+              <a:buChar char="•"/>
             </a:pPr>
             <a:r>
-              <a:t>• Generated downloadable outputs and PASS/FAIL validation reports.</a:t>
-            </a:r>
-          </a:p>
-        </p:txBody>
-      </p:sp>
-      <p:sp>
-        <p:nvSpPr>
-          <p:cNvPr id="5" name="TextBox 4"/>
-          <p:cNvSpPr txBox="1"/>
-          <p:nvPr/>
-        </p:nvSpPr>
-        <p:spPr>
-          <a:xfrm>
-            <a:off x="731520" y="2194560"/>
-            <a:ext cx="10515600" cy="548640"/>
-          </a:xfrm>
-          <a:prstGeom prst="rect">
-            <a:avLst/>
-          </a:prstGeom>
-          <a:noFill/>
-        </p:spPr>
-        <p:txBody>
-          <a:bodyPr wrap="none">
-            <a:spAutoFit/>
-          </a:bodyPr>
-          <a:lstStyle/>
-          <a:p>
-            <a:pPr>
-              <a:defRPr sz="2200">
-                <a:solidFill>
-                  <a:srgbClr val="323232"/>
-                </a:solidFill>
-              </a:defRPr>
+              <a:rPr lang="en-IN" dirty="0"/>
+              <a:t>Named ranges </a:t>
+            </a:r>
+          </a:p>
+          <a:p>
+            <a:pPr marL="342900" lvl="0" indent="-342900">
+              <a:buFont typeface="Arial" panose="020B0604020202020204" pitchFamily="34" charset="0"/>
+              <a:buChar char="•"/>
             </a:pPr>
             <a:r>
-              <a:t>• Processing metrics and logging support troubleshooting.</a:t>
+              <a:rPr lang="en-IN" dirty="0"/>
+              <a:t>Formula handling </a:t>
+            </a:r>
+          </a:p>
+          <a:p>
+            <a:pPr marL="342900" lvl="0" indent="-342900">
+              <a:buFont typeface="Arial" panose="020B0604020202020204" pitchFamily="34" charset="0"/>
+              <a:buChar char="•"/>
+            </a:pPr>
+            <a:r>
+              <a:rPr lang="en-IN" dirty="0"/>
+              <a:t>OneDrive file locks </a:t>
+            </a:r>
+          </a:p>
+          <a:p>
+            <a:pPr marL="342900" lvl="0" indent="-342900">
+              <a:buFont typeface="Arial" panose="020B0604020202020204" pitchFamily="34" charset="0"/>
+              <a:buChar char="•"/>
+            </a:pPr>
+            <a:r>
+              <a:rPr lang="en-IN" dirty="0"/>
+              <a:t>Performance optimization</a:t>
             </a:r>
           </a:p>
         </p:txBody>
@@ -4214,23 +3918,22 @@
 </file>
 
 <file path=ppt/slides/slide6.xml><?xml version="1.0" encoding="utf-8"?>
-<p:sld xmlns:a="http://schemas.openxmlformats.org/drawingml/2006/main" xmlns:p="http://schemas.openxmlformats.org/presentationml/2006/main" xmlns:r="http://schemas.openxmlformats.org/officeDocument/2006/relationships">
+<p:sld xmlns:a="http://schemas.openxmlformats.org/drawingml/2006/main" xmlns:r="http://schemas.openxmlformats.org/officeDocument/2006/relationships" xmlns:p="http://schemas.openxmlformats.org/presentationml/2006/main">
   <p:cSld>
-    <p:bg>
-      <p:bgPr>
-        <a:solidFill>
-          <a:srgbClr val="F5F8FC"/>
-        </a:solidFill>
-        <a:effectLst/>
-      </p:bgPr>
-    </p:bg>
     <p:spTree>
       <p:nvGrpSpPr>
         <p:cNvPr id="1" name=""/>
         <p:cNvGrpSpPr/>
         <p:nvPr/>
       </p:nvGrpSpPr>
-      <p:grpSpPr/>
+      <p:grpSpPr>
+        <a:xfrm>
+          <a:off x="0" y="0"/>
+          <a:ext cx="0" cy="0"/>
+          <a:chOff x="0" y="0"/>
+          <a:chExt cx="0" cy="0"/>
+        </a:xfrm>
+      </p:grpSpPr>
       <p:sp>
         <p:nvSpPr>
           <p:cNvPr id="2" name="Rectangle 1"/>
@@ -4278,21 +3981,27 @@
               </a:defRPr>
             </a:pPr>
             <a:r>
-              <a:t>Technology &amp; Design</a:t>
-            </a:r>
-          </a:p>
-        </p:txBody>
-      </p:sp>
-      <p:sp>
-        <p:nvSpPr>
-          <p:cNvPr id="3" name="TextBox 2"/>
+              <a:t>Business Outputs</a:t>
+            </a:r>
+          </a:p>
+        </p:txBody>
+      </p:sp>
+      <p:sp>
+        <p:nvSpPr>
+          <p:cNvPr id="7" name="TextBox 6">
+            <a:extLst>
+              <a:ext uri="{FF2B5EF4-FFF2-40B4-BE49-F238E27FC236}">
+                <a16:creationId xmlns:a16="http://schemas.microsoft.com/office/drawing/2014/main" id="{D7EACA6B-0261-F21A-C2FE-B5A81E1AAFC9}"/>
+              </a:ext>
+            </a:extLst>
+          </p:cNvPr>
           <p:cNvSpPr txBox="1"/>
           <p:nvPr/>
         </p:nvSpPr>
         <p:spPr>
           <a:xfrm>
-            <a:off x="731520" y="1005840"/>
-            <a:ext cx="10515600" cy="548640"/>
+            <a:off x="926275" y="1187532"/>
+            <a:ext cx="7077694" cy="2585323"/>
           </a:xfrm>
           <a:prstGeom prst="rect">
             <a:avLst/>
@@ -4300,126 +4009,60 @@
           <a:noFill/>
         </p:spPr>
         <p:txBody>
-          <a:bodyPr wrap="none">
+          <a:bodyPr wrap="square" rtlCol="0">
             <a:spAutoFit/>
           </a:bodyPr>
           <a:lstStyle/>
           <a:p>
-            <a:pPr>
-              <a:defRPr sz="2200">
-                <a:solidFill>
-                  <a:srgbClr val="323232"/>
-                </a:solidFill>
-              </a:defRPr>
-            </a:pPr>
-            <a:r>
-              <a:t>• Frontend: React + Material UI</a:t>
-            </a:r>
-          </a:p>
-        </p:txBody>
-      </p:sp>
-      <p:sp>
-        <p:nvSpPr>
-          <p:cNvPr id="4" name="TextBox 3"/>
-          <p:cNvSpPr txBox="1"/>
-          <p:nvPr/>
-        </p:nvSpPr>
-        <p:spPr>
-          <a:xfrm>
-            <a:off x="731520" y="1600200"/>
-            <a:ext cx="10515600" cy="548640"/>
-          </a:xfrm>
-          <a:prstGeom prst="rect">
-            <a:avLst/>
-          </a:prstGeom>
-          <a:noFill/>
-        </p:spPr>
-        <p:txBody>
-          <a:bodyPr wrap="none">
-            <a:spAutoFit/>
-          </a:bodyPr>
-          <a:lstStyle/>
-          <a:p>
-            <a:pPr>
-              <a:defRPr sz="2200">
-                <a:solidFill>
-                  <a:srgbClr val="323232"/>
-                </a:solidFill>
-              </a:defRPr>
-            </a:pPr>
-            <a:r>
-              <a:t>• Backend: FastAPI (Python)</a:t>
-            </a:r>
-          </a:p>
-        </p:txBody>
-      </p:sp>
-      <p:sp>
-        <p:nvSpPr>
-          <p:cNvPr id="5" name="TextBox 4"/>
-          <p:cNvSpPr txBox="1"/>
-          <p:nvPr/>
-        </p:nvSpPr>
-        <p:spPr>
-          <a:xfrm>
-            <a:off x="731520" y="2194560"/>
-            <a:ext cx="10515600" cy="548640"/>
-          </a:xfrm>
-          <a:prstGeom prst="rect">
-            <a:avLst/>
-          </a:prstGeom>
-          <a:noFill/>
-        </p:spPr>
-        <p:txBody>
-          <a:bodyPr wrap="none">
-            <a:spAutoFit/>
-          </a:bodyPr>
-          <a:lstStyle/>
-          <a:p>
-            <a:pPr>
-              <a:defRPr sz="2200">
-                <a:solidFill>
-                  <a:srgbClr val="323232"/>
-                </a:solidFill>
-              </a:defRPr>
-            </a:pPr>
-            <a:r>
-              <a:t>• Libraries: openpyxl, PyMuPDF, python-docx</a:t>
-            </a:r>
-          </a:p>
-        </p:txBody>
-      </p:sp>
-      <p:sp>
-        <p:nvSpPr>
-          <p:cNvPr id="6" name="TextBox 5"/>
-          <p:cNvSpPr txBox="1"/>
-          <p:nvPr/>
-        </p:nvSpPr>
-        <p:spPr>
-          <a:xfrm>
-            <a:off x="731520" y="2788920"/>
-            <a:ext cx="10515600" cy="548640"/>
-          </a:xfrm>
-          <a:prstGeom prst="rect">
-            <a:avLst/>
-          </a:prstGeom>
-          <a:noFill/>
-        </p:spPr>
-        <p:txBody>
-          <a:bodyPr wrap="none">
-            <a:spAutoFit/>
-          </a:bodyPr>
-          <a:lstStyle/>
-          <a:p>
-            <a:pPr>
-              <a:defRPr sz="2200">
-                <a:solidFill>
-                  <a:srgbClr val="323232"/>
-                </a:solidFill>
-              </a:defRPr>
-            </a:pPr>
-            <a:r>
-              <a:t>• Configuration-driven validation rules.</a:t>
-            </a:r>
+            <a:r>
+              <a:rPr lang="en-IN" dirty="0"/>
+              <a:t>✔ Excel automation without disturbing actual format, formula etc</a:t>
+            </a:r>
+          </a:p>
+          <a:p>
+            <a:r>
+              <a:rPr lang="en-IN" dirty="0"/>
+              <a:t>✔ PDF validation</a:t>
+            </a:r>
+          </a:p>
+          <a:p>
+            <a:r>
+              <a:rPr lang="en-IN" dirty="0"/>
+              <a:t>✔ Word validation</a:t>
+            </a:r>
+          </a:p>
+          <a:p>
+            <a:r>
+              <a:rPr lang="en-IN" dirty="0"/>
+              <a:t>✔ Server path processing</a:t>
+            </a:r>
+          </a:p>
+          <a:p>
+            <a:r>
+              <a:rPr lang="en-IN" dirty="0"/>
+              <a:t>✔ Large file (15 to 20k records) support</a:t>
+            </a:r>
+          </a:p>
+          <a:p>
+            <a:r>
+              <a:rPr lang="en-IN" dirty="0"/>
+              <a:t>✔ Auto Download</a:t>
+            </a:r>
+          </a:p>
+          <a:p>
+            <a:r>
+              <a:rPr lang="en-IN" dirty="0"/>
+              <a:t>✔ Single/multi file upload</a:t>
+            </a:r>
+          </a:p>
+          <a:p>
+            <a:r>
+              <a:rPr lang="en-IN" dirty="0"/>
+              <a:t>✔ Generating &amp; saving logs file</a:t>
+            </a:r>
+          </a:p>
+          <a:p>
+            <a:endParaRPr lang="en-US" dirty="0"/>
           </a:p>
         </p:txBody>
       </p:sp>
@@ -4432,7 +4075,308 @@
 </file>
 
 <file path=ppt/slides/slide7.xml><?xml version="1.0" encoding="utf-8"?>
-<p:sld xmlns:a="http://schemas.openxmlformats.org/drawingml/2006/main" xmlns:p="http://schemas.openxmlformats.org/presentationml/2006/main" xmlns:r="http://schemas.openxmlformats.org/officeDocument/2006/relationships">
+<p:sld xmlns:a="http://schemas.openxmlformats.org/drawingml/2006/main" xmlns:r="http://schemas.openxmlformats.org/officeDocument/2006/relationships" xmlns:p="http://schemas.openxmlformats.org/presentationml/2006/main">
+  <p:cSld>
+    <p:spTree>
+      <p:nvGrpSpPr>
+        <p:cNvPr id="1" name=""/>
+        <p:cNvGrpSpPr/>
+        <p:nvPr/>
+      </p:nvGrpSpPr>
+      <p:grpSpPr>
+        <a:xfrm>
+          <a:off x="0" y="0"/>
+          <a:ext cx="0" cy="0"/>
+          <a:chOff x="0" y="0"/>
+          <a:chExt cx="0" cy="0"/>
+        </a:xfrm>
+      </p:grpSpPr>
+      <p:sp>
+        <p:nvSpPr>
+          <p:cNvPr id="2" name="Rectangle 1"/>
+          <p:cNvSpPr/>
+          <p:nvPr/>
+        </p:nvSpPr>
+        <p:spPr>
+          <a:xfrm>
+            <a:off x="0" y="0"/>
+            <a:ext cx="12188952" cy="600000"/>
+          </a:xfrm>
+          <a:prstGeom prst="rect">
+            <a:avLst/>
+          </a:prstGeom>
+          <a:solidFill>
+            <a:srgbClr val="E67E22"/>
+          </a:solidFill>
+          <a:ln>
+            <a:noFill/>
+          </a:ln>
+        </p:spPr>
+        <p:style>
+          <a:lnRef idx="1">
+            <a:schemeClr val="accent1"/>
+          </a:lnRef>
+          <a:fillRef idx="3">
+            <a:schemeClr val="accent1"/>
+          </a:fillRef>
+          <a:effectRef idx="2">
+            <a:schemeClr val="accent1"/>
+          </a:effectRef>
+          <a:fontRef idx="minor">
+            <a:schemeClr val="lt1"/>
+          </a:fontRef>
+        </p:style>
+        <p:txBody>
+          <a:bodyPr rtlCol="0" anchor="ctr"/>
+          <a:lstStyle/>
+          <a:p>
+            <a:pPr algn="ctr">
+              <a:defRPr sz="2800" b="1">
+                <a:solidFill>
+                  <a:srgbClr val="FFFFFF"/>
+                </a:solidFill>
+              </a:defRPr>
+            </a:pPr>
+            <a:r>
+              <a:t>Future Extensions</a:t>
+            </a:r>
+          </a:p>
+        </p:txBody>
+      </p:sp>
+      <p:sp>
+        <p:nvSpPr>
+          <p:cNvPr id="3" name="TextBox 2">
+            <a:extLst>
+              <a:ext uri="{FF2B5EF4-FFF2-40B4-BE49-F238E27FC236}">
+                <a16:creationId xmlns:a16="http://schemas.microsoft.com/office/drawing/2014/main" id="{901079C9-9390-3DA8-2964-56EF72FAAAFB}"/>
+              </a:ext>
+            </a:extLst>
+          </p:cNvPr>
+          <p:cNvSpPr txBox="1"/>
+          <p:nvPr/>
+        </p:nvSpPr>
+        <p:spPr>
+          <a:xfrm>
+            <a:off x="1056903" y="826070"/>
+            <a:ext cx="3125599" cy="6186309"/>
+          </a:xfrm>
+          <a:prstGeom prst="rect">
+            <a:avLst/>
+          </a:prstGeom>
+          <a:noFill/>
+        </p:spPr>
+        <p:txBody>
+          <a:bodyPr wrap="none" rtlCol="0">
+            <a:spAutoFit/>
+          </a:bodyPr>
+          <a:lstStyle/>
+          <a:p>
+            <a:r>
+              <a:rPr lang="en-IN" b="1" dirty="0"/>
+              <a:t>Excel &amp; Document Automation</a:t>
+            </a:r>
+            <a:endParaRPr lang="en-IN" dirty="0"/>
+          </a:p>
+          <a:p>
+            <a:pPr marL="285750" lvl="0" indent="-285750">
+              <a:buFont typeface="Arial" panose="020B0604020202020204" pitchFamily="34" charset="0"/>
+              <a:buChar char="•"/>
+            </a:pPr>
+            <a:r>
+              <a:rPr lang="en-IN" dirty="0"/>
+              <a:t>Bulk Processing </a:t>
+            </a:r>
+          </a:p>
+          <a:p>
+            <a:pPr marL="285750" lvl="0" indent="-285750">
+              <a:buFont typeface="Arial" panose="020B0604020202020204" pitchFamily="34" charset="0"/>
+              <a:buChar char="•"/>
+            </a:pPr>
+            <a:r>
+              <a:rPr lang="en-IN" dirty="0"/>
+              <a:t>Version Comparison </a:t>
+            </a:r>
+          </a:p>
+          <a:p>
+            <a:pPr marL="285750" lvl="0" indent="-285750">
+              <a:buFont typeface="Arial" panose="020B0604020202020204" pitchFamily="34" charset="0"/>
+              <a:buChar char="•"/>
+            </a:pPr>
+            <a:r>
+              <a:rPr lang="en-IN" dirty="0"/>
+              <a:t>Template Automation </a:t>
+            </a:r>
+          </a:p>
+          <a:p>
+            <a:pPr marL="285750" lvl="0" indent="-285750">
+              <a:buFont typeface="Arial" panose="020B0604020202020204" pitchFamily="34" charset="0"/>
+              <a:buChar char="•"/>
+            </a:pPr>
+            <a:r>
+              <a:rPr lang="en-IN" dirty="0"/>
+              <a:t>Advanced Validation </a:t>
+            </a:r>
+          </a:p>
+          <a:p>
+            <a:pPr marL="285750" lvl="0" indent="-285750">
+              <a:buFont typeface="Arial" panose="020B0604020202020204" pitchFamily="34" charset="0"/>
+              <a:buChar char="•"/>
+            </a:pPr>
+            <a:r>
+              <a:rPr lang="en-IN" dirty="0"/>
+              <a:t>PDF/Word Data Extraction </a:t>
+            </a:r>
+          </a:p>
+          <a:p>
+            <a:pPr lvl="0"/>
+            <a:endParaRPr lang="en-IN" dirty="0"/>
+          </a:p>
+          <a:p>
+            <a:r>
+              <a:rPr lang="en-IN" b="1" dirty="0"/>
+              <a:t>Workflow &amp; Integration</a:t>
+            </a:r>
+            <a:endParaRPr lang="en-IN" dirty="0"/>
+          </a:p>
+          <a:p>
+            <a:pPr marL="285750" lvl="0" indent="-285750">
+              <a:buFont typeface="Arial" panose="020B0604020202020204" pitchFamily="34" charset="0"/>
+              <a:buChar char="•"/>
+            </a:pPr>
+            <a:r>
+              <a:rPr lang="en-IN" dirty="0"/>
+              <a:t>Unified Dashboard </a:t>
+            </a:r>
+          </a:p>
+          <a:p>
+            <a:pPr marL="285750" lvl="0" indent="-285750">
+              <a:buFont typeface="Arial" panose="020B0604020202020204" pitchFamily="34" charset="0"/>
+              <a:buChar char="•"/>
+            </a:pPr>
+            <a:r>
+              <a:rPr lang="en-IN" dirty="0"/>
+              <a:t>Configurable Rule Packs </a:t>
+            </a:r>
+          </a:p>
+          <a:p>
+            <a:pPr marL="285750" lvl="0" indent="-285750">
+              <a:buFont typeface="Arial" panose="020B0604020202020204" pitchFamily="34" charset="0"/>
+              <a:buChar char="•"/>
+            </a:pPr>
+            <a:r>
+              <a:rPr lang="en-IN" dirty="0"/>
+              <a:t>Exception Management </a:t>
+            </a:r>
+          </a:p>
+          <a:p>
+            <a:pPr marL="285750" lvl="0" indent="-285750">
+              <a:buFont typeface="Arial" panose="020B0604020202020204" pitchFamily="34" charset="0"/>
+              <a:buChar char="•"/>
+            </a:pPr>
+            <a:r>
+              <a:rPr lang="en-IN" dirty="0"/>
+              <a:t>Scheduled Processing </a:t>
+            </a:r>
+          </a:p>
+          <a:p>
+            <a:pPr marL="285750" lvl="0" indent="-285750">
+              <a:buFont typeface="Arial" panose="020B0604020202020204" pitchFamily="34" charset="0"/>
+              <a:buChar char="•"/>
+            </a:pPr>
+            <a:r>
+              <a:rPr lang="en-IN" dirty="0"/>
+              <a:t>API Integration</a:t>
+            </a:r>
+          </a:p>
+          <a:p>
+            <a:pPr lvl="0"/>
+            <a:r>
+              <a:rPr lang="en-IN" dirty="0"/>
+              <a:t> </a:t>
+            </a:r>
+          </a:p>
+          <a:p>
+            <a:r>
+              <a:rPr lang="en-IN" b="1" dirty="0"/>
+              <a:t>Enterprise Readiness</a:t>
+            </a:r>
+            <a:endParaRPr lang="en-IN" dirty="0"/>
+          </a:p>
+          <a:p>
+            <a:pPr marL="285750" lvl="0" indent="-285750">
+              <a:buFont typeface="Arial" panose="020B0604020202020204" pitchFamily="34" charset="0"/>
+              <a:buChar char="•"/>
+            </a:pPr>
+            <a:r>
+              <a:rPr lang="en-IN" dirty="0"/>
+              <a:t>Authentication &amp; RBAC </a:t>
+            </a:r>
+          </a:p>
+          <a:p>
+            <a:pPr marL="285750" lvl="0" indent="-285750">
+              <a:buFont typeface="Arial" panose="020B0604020202020204" pitchFamily="34" charset="0"/>
+              <a:buChar char="•"/>
+            </a:pPr>
+            <a:r>
+              <a:rPr lang="en-IN" dirty="0"/>
+              <a:t>Audit &amp; Compliance </a:t>
+            </a:r>
+          </a:p>
+          <a:p>
+            <a:pPr marL="285750" lvl="0" indent="-285750">
+              <a:buFont typeface="Arial" panose="020B0604020202020204" pitchFamily="34" charset="0"/>
+              <a:buChar char="•"/>
+            </a:pPr>
+            <a:r>
+              <a:rPr lang="en-IN" dirty="0"/>
+              <a:t>Notifications </a:t>
+            </a:r>
+          </a:p>
+          <a:p>
+            <a:pPr marL="285750" lvl="0" indent="-285750">
+              <a:buFont typeface="Arial" panose="020B0604020202020204" pitchFamily="34" charset="0"/>
+              <a:buChar char="•"/>
+            </a:pPr>
+            <a:r>
+              <a:rPr lang="en-IN" dirty="0"/>
+              <a:t>Antivirus &amp; Security </a:t>
+            </a:r>
+          </a:p>
+          <a:p>
+            <a:pPr marL="285750" lvl="0" indent="-285750">
+              <a:buFont typeface="Arial" panose="020B0604020202020204" pitchFamily="34" charset="0"/>
+              <a:buChar char="•"/>
+            </a:pPr>
+            <a:r>
+              <a:rPr lang="en-IN" dirty="0"/>
+              <a:t>Retention Policies </a:t>
+            </a:r>
+          </a:p>
+          <a:p>
+            <a:pPr marL="285750" lvl="0" indent="-285750">
+              <a:buFont typeface="Arial" panose="020B0604020202020204" pitchFamily="34" charset="0"/>
+              <a:buChar char="•"/>
+            </a:pPr>
+            <a:r>
+              <a:rPr lang="en-IN" dirty="0"/>
+              <a:t>Monitoring &amp; Analytics</a:t>
+            </a:r>
+          </a:p>
+          <a:p>
+            <a:endParaRPr lang="en-US" dirty="0"/>
+          </a:p>
+        </p:txBody>
+      </p:sp>
+    </p:spTree>
+  </p:cSld>
+  <p:clrMapOvr>
+    <a:masterClrMapping/>
+  </p:clrMapOvr>
+</p:sld>
+</file>
+
+<file path=ppt/slides/slide8.xml><?xml version="1.0" encoding="utf-8"?>
+<p:sld xmlns:a="http://schemas.openxmlformats.org/drawingml/2006/main" xmlns:r="http://schemas.openxmlformats.org/officeDocument/2006/relationships" xmlns:p="http://schemas.openxmlformats.org/presentationml/2006/main">
   <p:cSld>
     <p:bg>
       <p:bgPr>
@@ -4448,7 +4392,14 @@
         <p:cNvGrpSpPr/>
         <p:nvPr/>
       </p:nvGrpSpPr>
-      <p:grpSpPr/>
+      <p:grpSpPr>
+        <a:xfrm>
+          <a:off x="0" y="0"/>
+          <a:ext cx="0" cy="0"/>
+          <a:chOff x="0" y="0"/>
+          <a:chExt cx="0" cy="0"/>
+        </a:xfrm>
+      </p:grpSpPr>
       <p:sp>
         <p:nvSpPr>
           <p:cNvPr id="2" name="Rectangle 1"/>
@@ -4524,14 +4475,14 @@
           <a:lstStyle/>
           <a:p>
             <a:pPr>
-              <a:defRPr sz="2200">
+              <a:defRPr sz="2000">
                 <a:solidFill>
                   <a:srgbClr val="323232"/>
                 </a:solidFill>
               </a:defRPr>
             </a:pPr>
             <a:r>
-              <a:t>• POC confirms technical feasibility for document automation.</a:t>
+              <a:t>• POC confirms document automation is feasible on our platform.</a:t>
             </a:r>
           </a:p>
         </p:txBody>
@@ -4559,14 +4510,14 @@
           <a:lstStyle/>
           <a:p>
             <a:pPr>
-              <a:defRPr sz="2200">
+              <a:defRPr sz="2000">
                 <a:solidFill>
                   <a:srgbClr val="323232"/>
                 </a:solidFill>
               </a:defRPr>
             </a:pPr>
             <a:r>
-              <a:t>• Recommended next step: Pilot one business workflow.</a:t>
+              <a:t>• Pilot one production workflow with auth, monitoring, and environment-based config.</a:t>
             </a:r>
           </a:p>
         </p:txBody>
@@ -4594,14 +4545,14 @@
           <a:lstStyle/>
           <a:p>
             <a:pPr>
-              <a:defRPr sz="2200">
+              <a:defRPr sz="2000">
                 <a:solidFill>
                   <a:srgbClr val="323232"/>
                 </a:solidFill>
               </a:defRPr>
             </a:pPr>
             <a:r>
-              <a:t>• Production enhancements: auth, monitoring, queue, audit logs.</a:t>
+              <a:t>• Migrate priority SCR/CAL logic onto this stack.</a:t>
             </a:r>
           </a:p>
         </p:txBody>
